--- a/Presentation/SC_Birb_Presentation.pptx
+++ b/Presentation/SC_Birb_Presentation.pptx
@@ -8284,6 +8284,1705 @@
   <p:clrMapOvr>
     <a:masterClrMapping/>
   </p:clrMapOvr>
+  <p:timing>
+    <p:tnLst>
+      <p:par>
+        <p:cTn id="1" dur="indefinite" restart="never" nodeType="tmRoot">
+          <p:childTnLst>
+            <p:seq concurrent="1" nextAc="seek">
+              <p:cTn id="2" dur="indefinite" nodeType="mainSeq">
+                <p:childTnLst>
+                  <p:par>
+                    <p:cTn id="3" fill="hold">
+                      <p:stCondLst>
+                        <p:cond delay="indefinite"/>
+                      </p:stCondLst>
+                      <p:childTnLst>
+                        <p:par>
+                          <p:cTn id="4" fill="hold">
+                            <p:stCondLst>
+                              <p:cond delay="0"/>
+                            </p:stCondLst>
+                            <p:childTnLst>
+                              <p:par>
+                                <p:cTn id="5" presetID="41" presetClass="entr" presetSubtype="0" fill="hold" grpId="0" nodeType="clickEffect">
+                                  <p:stCondLst>
+                                    <p:cond delay="0"/>
+                                  </p:stCondLst>
+                                  <p:iterate type="lt">
+                                    <p:tmPct val="10000"/>
+                                  </p:iterate>
+                                  <p:childTnLst>
+                                    <p:set>
+                                      <p:cBhvr>
+                                        <p:cTn id="6" dur="1" fill="hold">
+                                          <p:stCondLst>
+                                            <p:cond delay="0"/>
+                                          </p:stCondLst>
+                                        </p:cTn>
+                                        <p:tgtEl>
+                                          <p:spTgt spid="3">
+                                            <p:txEl>
+                                              <p:pRg st="0" end="0"/>
+                                            </p:txEl>
+                                          </p:spTgt>
+                                        </p:tgtEl>
+                                        <p:attrNameLst>
+                                          <p:attrName>style.visibility</p:attrName>
+                                        </p:attrNameLst>
+                                      </p:cBhvr>
+                                      <p:to>
+                                        <p:strVal val="visible"/>
+                                      </p:to>
+                                    </p:set>
+                                    <p:anim calcmode="lin" valueType="num">
+                                      <p:cBhvr>
+                                        <p:cTn id="7" dur="500" fill="hold"/>
+                                        <p:tgtEl>
+                                          <p:spTgt spid="3">
+                                            <p:txEl>
+                                              <p:pRg st="0" end="0"/>
+                                            </p:txEl>
+                                          </p:spTgt>
+                                        </p:tgtEl>
+                                        <p:attrNameLst>
+                                          <p:attrName>ppt_x</p:attrName>
+                                        </p:attrNameLst>
+                                      </p:cBhvr>
+                                      <p:tavLst>
+                                        <p:tav tm="0">
+                                          <p:val>
+                                            <p:strVal val="#ppt_x"/>
+                                          </p:val>
+                                        </p:tav>
+                                        <p:tav tm="50000">
+                                          <p:val>
+                                            <p:strVal val="#ppt_x+.1"/>
+                                          </p:val>
+                                        </p:tav>
+                                        <p:tav tm="100000">
+                                          <p:val>
+                                            <p:strVal val="#ppt_x"/>
+                                          </p:val>
+                                        </p:tav>
+                                      </p:tavLst>
+                                    </p:anim>
+                                    <p:anim calcmode="lin" valueType="num">
+                                      <p:cBhvr>
+                                        <p:cTn id="8" dur="500" fill="hold"/>
+                                        <p:tgtEl>
+                                          <p:spTgt spid="3">
+                                            <p:txEl>
+                                              <p:pRg st="0" end="0"/>
+                                            </p:txEl>
+                                          </p:spTgt>
+                                        </p:tgtEl>
+                                        <p:attrNameLst>
+                                          <p:attrName>ppt_y</p:attrName>
+                                        </p:attrNameLst>
+                                      </p:cBhvr>
+                                      <p:tavLst>
+                                        <p:tav tm="0">
+                                          <p:val>
+                                            <p:strVal val="#ppt_y"/>
+                                          </p:val>
+                                        </p:tav>
+                                        <p:tav tm="100000">
+                                          <p:val>
+                                            <p:strVal val="#ppt_y"/>
+                                          </p:val>
+                                        </p:tav>
+                                      </p:tavLst>
+                                    </p:anim>
+                                    <p:anim calcmode="lin" valueType="num">
+                                      <p:cBhvr>
+                                        <p:cTn id="9" dur="500" fill="hold"/>
+                                        <p:tgtEl>
+                                          <p:spTgt spid="3">
+                                            <p:txEl>
+                                              <p:pRg st="0" end="0"/>
+                                            </p:txEl>
+                                          </p:spTgt>
+                                        </p:tgtEl>
+                                        <p:attrNameLst>
+                                          <p:attrName>ppt_h</p:attrName>
+                                        </p:attrNameLst>
+                                      </p:cBhvr>
+                                      <p:tavLst>
+                                        <p:tav tm="0">
+                                          <p:val>
+                                            <p:strVal val="#ppt_h/10"/>
+                                          </p:val>
+                                        </p:tav>
+                                        <p:tav tm="50000">
+                                          <p:val>
+                                            <p:strVal val="#ppt_h+.01"/>
+                                          </p:val>
+                                        </p:tav>
+                                        <p:tav tm="100000">
+                                          <p:val>
+                                            <p:strVal val="#ppt_h"/>
+                                          </p:val>
+                                        </p:tav>
+                                      </p:tavLst>
+                                    </p:anim>
+                                    <p:anim calcmode="lin" valueType="num">
+                                      <p:cBhvr>
+                                        <p:cTn id="10" dur="500" fill="hold"/>
+                                        <p:tgtEl>
+                                          <p:spTgt spid="3">
+                                            <p:txEl>
+                                              <p:pRg st="0" end="0"/>
+                                            </p:txEl>
+                                          </p:spTgt>
+                                        </p:tgtEl>
+                                        <p:attrNameLst>
+                                          <p:attrName>ppt_w</p:attrName>
+                                        </p:attrNameLst>
+                                      </p:cBhvr>
+                                      <p:tavLst>
+                                        <p:tav tm="0">
+                                          <p:val>
+                                            <p:strVal val="#ppt_w/10"/>
+                                          </p:val>
+                                        </p:tav>
+                                        <p:tav tm="50000">
+                                          <p:val>
+                                            <p:strVal val="#ppt_w+.01"/>
+                                          </p:val>
+                                        </p:tav>
+                                        <p:tav tm="100000">
+                                          <p:val>
+                                            <p:strVal val="#ppt_w"/>
+                                          </p:val>
+                                        </p:tav>
+                                      </p:tavLst>
+                                    </p:anim>
+                                    <p:animEffect transition="in" filter="fade">
+                                      <p:cBhvr>
+                                        <p:cTn id="11" dur="500" tmFilter="0,0; .5, 1; 1, 1"/>
+                                        <p:tgtEl>
+                                          <p:spTgt spid="3">
+                                            <p:txEl>
+                                              <p:pRg st="0" end="0"/>
+                                            </p:txEl>
+                                          </p:spTgt>
+                                        </p:tgtEl>
+                                      </p:cBhvr>
+                                    </p:animEffect>
+                                  </p:childTnLst>
+                                </p:cTn>
+                              </p:par>
+                            </p:childTnLst>
+                          </p:cTn>
+                        </p:par>
+                      </p:childTnLst>
+                    </p:cTn>
+                  </p:par>
+                  <p:par>
+                    <p:cTn id="12" fill="hold">
+                      <p:stCondLst>
+                        <p:cond delay="indefinite"/>
+                      </p:stCondLst>
+                      <p:childTnLst>
+                        <p:par>
+                          <p:cTn id="13" fill="hold">
+                            <p:stCondLst>
+                              <p:cond delay="0"/>
+                            </p:stCondLst>
+                            <p:childTnLst>
+                              <p:par>
+                                <p:cTn id="14" presetID="41" presetClass="entr" presetSubtype="0" fill="hold" grpId="0" nodeType="clickEffect">
+                                  <p:stCondLst>
+                                    <p:cond delay="0"/>
+                                  </p:stCondLst>
+                                  <p:iterate type="lt">
+                                    <p:tmPct val="10000"/>
+                                  </p:iterate>
+                                  <p:childTnLst>
+                                    <p:set>
+                                      <p:cBhvr>
+                                        <p:cTn id="15" dur="1" fill="hold">
+                                          <p:stCondLst>
+                                            <p:cond delay="0"/>
+                                          </p:stCondLst>
+                                        </p:cTn>
+                                        <p:tgtEl>
+                                          <p:spTgt spid="3">
+                                            <p:txEl>
+                                              <p:pRg st="1" end="1"/>
+                                            </p:txEl>
+                                          </p:spTgt>
+                                        </p:tgtEl>
+                                        <p:attrNameLst>
+                                          <p:attrName>style.visibility</p:attrName>
+                                        </p:attrNameLst>
+                                      </p:cBhvr>
+                                      <p:to>
+                                        <p:strVal val="visible"/>
+                                      </p:to>
+                                    </p:set>
+                                    <p:anim calcmode="lin" valueType="num">
+                                      <p:cBhvr>
+                                        <p:cTn id="16" dur="500" fill="hold"/>
+                                        <p:tgtEl>
+                                          <p:spTgt spid="3">
+                                            <p:txEl>
+                                              <p:pRg st="1" end="1"/>
+                                            </p:txEl>
+                                          </p:spTgt>
+                                        </p:tgtEl>
+                                        <p:attrNameLst>
+                                          <p:attrName>ppt_x</p:attrName>
+                                        </p:attrNameLst>
+                                      </p:cBhvr>
+                                      <p:tavLst>
+                                        <p:tav tm="0">
+                                          <p:val>
+                                            <p:strVal val="#ppt_x"/>
+                                          </p:val>
+                                        </p:tav>
+                                        <p:tav tm="50000">
+                                          <p:val>
+                                            <p:strVal val="#ppt_x+.1"/>
+                                          </p:val>
+                                        </p:tav>
+                                        <p:tav tm="100000">
+                                          <p:val>
+                                            <p:strVal val="#ppt_x"/>
+                                          </p:val>
+                                        </p:tav>
+                                      </p:tavLst>
+                                    </p:anim>
+                                    <p:anim calcmode="lin" valueType="num">
+                                      <p:cBhvr>
+                                        <p:cTn id="17" dur="500" fill="hold"/>
+                                        <p:tgtEl>
+                                          <p:spTgt spid="3">
+                                            <p:txEl>
+                                              <p:pRg st="1" end="1"/>
+                                            </p:txEl>
+                                          </p:spTgt>
+                                        </p:tgtEl>
+                                        <p:attrNameLst>
+                                          <p:attrName>ppt_y</p:attrName>
+                                        </p:attrNameLst>
+                                      </p:cBhvr>
+                                      <p:tavLst>
+                                        <p:tav tm="0">
+                                          <p:val>
+                                            <p:strVal val="#ppt_y"/>
+                                          </p:val>
+                                        </p:tav>
+                                        <p:tav tm="100000">
+                                          <p:val>
+                                            <p:strVal val="#ppt_y"/>
+                                          </p:val>
+                                        </p:tav>
+                                      </p:tavLst>
+                                    </p:anim>
+                                    <p:anim calcmode="lin" valueType="num">
+                                      <p:cBhvr>
+                                        <p:cTn id="18" dur="500" fill="hold"/>
+                                        <p:tgtEl>
+                                          <p:spTgt spid="3">
+                                            <p:txEl>
+                                              <p:pRg st="1" end="1"/>
+                                            </p:txEl>
+                                          </p:spTgt>
+                                        </p:tgtEl>
+                                        <p:attrNameLst>
+                                          <p:attrName>ppt_h</p:attrName>
+                                        </p:attrNameLst>
+                                      </p:cBhvr>
+                                      <p:tavLst>
+                                        <p:tav tm="0">
+                                          <p:val>
+                                            <p:strVal val="#ppt_h/10"/>
+                                          </p:val>
+                                        </p:tav>
+                                        <p:tav tm="50000">
+                                          <p:val>
+                                            <p:strVal val="#ppt_h+.01"/>
+                                          </p:val>
+                                        </p:tav>
+                                        <p:tav tm="100000">
+                                          <p:val>
+                                            <p:strVal val="#ppt_h"/>
+                                          </p:val>
+                                        </p:tav>
+                                      </p:tavLst>
+                                    </p:anim>
+                                    <p:anim calcmode="lin" valueType="num">
+                                      <p:cBhvr>
+                                        <p:cTn id="19" dur="500" fill="hold"/>
+                                        <p:tgtEl>
+                                          <p:spTgt spid="3">
+                                            <p:txEl>
+                                              <p:pRg st="1" end="1"/>
+                                            </p:txEl>
+                                          </p:spTgt>
+                                        </p:tgtEl>
+                                        <p:attrNameLst>
+                                          <p:attrName>ppt_w</p:attrName>
+                                        </p:attrNameLst>
+                                      </p:cBhvr>
+                                      <p:tavLst>
+                                        <p:tav tm="0">
+                                          <p:val>
+                                            <p:strVal val="#ppt_w/10"/>
+                                          </p:val>
+                                        </p:tav>
+                                        <p:tav tm="50000">
+                                          <p:val>
+                                            <p:strVal val="#ppt_w+.01"/>
+                                          </p:val>
+                                        </p:tav>
+                                        <p:tav tm="100000">
+                                          <p:val>
+                                            <p:strVal val="#ppt_w"/>
+                                          </p:val>
+                                        </p:tav>
+                                      </p:tavLst>
+                                    </p:anim>
+                                    <p:animEffect transition="in" filter="fade">
+                                      <p:cBhvr>
+                                        <p:cTn id="20" dur="500" tmFilter="0,0; .5, 1; 1, 1"/>
+                                        <p:tgtEl>
+                                          <p:spTgt spid="3">
+                                            <p:txEl>
+                                              <p:pRg st="1" end="1"/>
+                                            </p:txEl>
+                                          </p:spTgt>
+                                        </p:tgtEl>
+                                      </p:cBhvr>
+                                    </p:animEffect>
+                                  </p:childTnLst>
+                                </p:cTn>
+                              </p:par>
+                            </p:childTnLst>
+                          </p:cTn>
+                        </p:par>
+                      </p:childTnLst>
+                    </p:cTn>
+                  </p:par>
+                  <p:par>
+                    <p:cTn id="21" fill="hold">
+                      <p:stCondLst>
+                        <p:cond delay="indefinite"/>
+                      </p:stCondLst>
+                      <p:childTnLst>
+                        <p:par>
+                          <p:cTn id="22" fill="hold">
+                            <p:stCondLst>
+                              <p:cond delay="0"/>
+                            </p:stCondLst>
+                            <p:childTnLst>
+                              <p:par>
+                                <p:cTn id="23" presetID="41" presetClass="entr" presetSubtype="0" fill="hold" grpId="0" nodeType="clickEffect">
+                                  <p:stCondLst>
+                                    <p:cond delay="0"/>
+                                  </p:stCondLst>
+                                  <p:iterate type="lt">
+                                    <p:tmPct val="10000"/>
+                                  </p:iterate>
+                                  <p:childTnLst>
+                                    <p:set>
+                                      <p:cBhvr>
+                                        <p:cTn id="24" dur="1" fill="hold">
+                                          <p:stCondLst>
+                                            <p:cond delay="0"/>
+                                          </p:stCondLst>
+                                        </p:cTn>
+                                        <p:tgtEl>
+                                          <p:spTgt spid="3">
+                                            <p:txEl>
+                                              <p:pRg st="2" end="2"/>
+                                            </p:txEl>
+                                          </p:spTgt>
+                                        </p:tgtEl>
+                                        <p:attrNameLst>
+                                          <p:attrName>style.visibility</p:attrName>
+                                        </p:attrNameLst>
+                                      </p:cBhvr>
+                                      <p:to>
+                                        <p:strVal val="visible"/>
+                                      </p:to>
+                                    </p:set>
+                                    <p:anim calcmode="lin" valueType="num">
+                                      <p:cBhvr>
+                                        <p:cTn id="25" dur="500" fill="hold"/>
+                                        <p:tgtEl>
+                                          <p:spTgt spid="3">
+                                            <p:txEl>
+                                              <p:pRg st="2" end="2"/>
+                                            </p:txEl>
+                                          </p:spTgt>
+                                        </p:tgtEl>
+                                        <p:attrNameLst>
+                                          <p:attrName>ppt_x</p:attrName>
+                                        </p:attrNameLst>
+                                      </p:cBhvr>
+                                      <p:tavLst>
+                                        <p:tav tm="0">
+                                          <p:val>
+                                            <p:strVal val="#ppt_x"/>
+                                          </p:val>
+                                        </p:tav>
+                                        <p:tav tm="50000">
+                                          <p:val>
+                                            <p:strVal val="#ppt_x+.1"/>
+                                          </p:val>
+                                        </p:tav>
+                                        <p:tav tm="100000">
+                                          <p:val>
+                                            <p:strVal val="#ppt_x"/>
+                                          </p:val>
+                                        </p:tav>
+                                      </p:tavLst>
+                                    </p:anim>
+                                    <p:anim calcmode="lin" valueType="num">
+                                      <p:cBhvr>
+                                        <p:cTn id="26" dur="500" fill="hold"/>
+                                        <p:tgtEl>
+                                          <p:spTgt spid="3">
+                                            <p:txEl>
+                                              <p:pRg st="2" end="2"/>
+                                            </p:txEl>
+                                          </p:spTgt>
+                                        </p:tgtEl>
+                                        <p:attrNameLst>
+                                          <p:attrName>ppt_y</p:attrName>
+                                        </p:attrNameLst>
+                                      </p:cBhvr>
+                                      <p:tavLst>
+                                        <p:tav tm="0">
+                                          <p:val>
+                                            <p:strVal val="#ppt_y"/>
+                                          </p:val>
+                                        </p:tav>
+                                        <p:tav tm="100000">
+                                          <p:val>
+                                            <p:strVal val="#ppt_y"/>
+                                          </p:val>
+                                        </p:tav>
+                                      </p:tavLst>
+                                    </p:anim>
+                                    <p:anim calcmode="lin" valueType="num">
+                                      <p:cBhvr>
+                                        <p:cTn id="27" dur="500" fill="hold"/>
+                                        <p:tgtEl>
+                                          <p:spTgt spid="3">
+                                            <p:txEl>
+                                              <p:pRg st="2" end="2"/>
+                                            </p:txEl>
+                                          </p:spTgt>
+                                        </p:tgtEl>
+                                        <p:attrNameLst>
+                                          <p:attrName>ppt_h</p:attrName>
+                                        </p:attrNameLst>
+                                      </p:cBhvr>
+                                      <p:tavLst>
+                                        <p:tav tm="0">
+                                          <p:val>
+                                            <p:strVal val="#ppt_h/10"/>
+                                          </p:val>
+                                        </p:tav>
+                                        <p:tav tm="50000">
+                                          <p:val>
+                                            <p:strVal val="#ppt_h+.01"/>
+                                          </p:val>
+                                        </p:tav>
+                                        <p:tav tm="100000">
+                                          <p:val>
+                                            <p:strVal val="#ppt_h"/>
+                                          </p:val>
+                                        </p:tav>
+                                      </p:tavLst>
+                                    </p:anim>
+                                    <p:anim calcmode="lin" valueType="num">
+                                      <p:cBhvr>
+                                        <p:cTn id="28" dur="500" fill="hold"/>
+                                        <p:tgtEl>
+                                          <p:spTgt spid="3">
+                                            <p:txEl>
+                                              <p:pRg st="2" end="2"/>
+                                            </p:txEl>
+                                          </p:spTgt>
+                                        </p:tgtEl>
+                                        <p:attrNameLst>
+                                          <p:attrName>ppt_w</p:attrName>
+                                        </p:attrNameLst>
+                                      </p:cBhvr>
+                                      <p:tavLst>
+                                        <p:tav tm="0">
+                                          <p:val>
+                                            <p:strVal val="#ppt_w/10"/>
+                                          </p:val>
+                                        </p:tav>
+                                        <p:tav tm="50000">
+                                          <p:val>
+                                            <p:strVal val="#ppt_w+.01"/>
+                                          </p:val>
+                                        </p:tav>
+                                        <p:tav tm="100000">
+                                          <p:val>
+                                            <p:strVal val="#ppt_w"/>
+                                          </p:val>
+                                        </p:tav>
+                                      </p:tavLst>
+                                    </p:anim>
+                                    <p:animEffect transition="in" filter="fade">
+                                      <p:cBhvr>
+                                        <p:cTn id="29" dur="500" tmFilter="0,0; .5, 1; 1, 1"/>
+                                        <p:tgtEl>
+                                          <p:spTgt spid="3">
+                                            <p:txEl>
+                                              <p:pRg st="2" end="2"/>
+                                            </p:txEl>
+                                          </p:spTgt>
+                                        </p:tgtEl>
+                                      </p:cBhvr>
+                                    </p:animEffect>
+                                  </p:childTnLst>
+                                </p:cTn>
+                              </p:par>
+                            </p:childTnLst>
+                          </p:cTn>
+                        </p:par>
+                      </p:childTnLst>
+                    </p:cTn>
+                  </p:par>
+                  <p:par>
+                    <p:cTn id="30" fill="hold">
+                      <p:stCondLst>
+                        <p:cond delay="indefinite"/>
+                      </p:stCondLst>
+                      <p:childTnLst>
+                        <p:par>
+                          <p:cTn id="31" fill="hold">
+                            <p:stCondLst>
+                              <p:cond delay="0"/>
+                            </p:stCondLst>
+                            <p:childTnLst>
+                              <p:par>
+                                <p:cTn id="32" presetID="41" presetClass="entr" presetSubtype="0" fill="hold" grpId="0" nodeType="clickEffect">
+                                  <p:stCondLst>
+                                    <p:cond delay="0"/>
+                                  </p:stCondLst>
+                                  <p:iterate type="lt">
+                                    <p:tmPct val="10000"/>
+                                  </p:iterate>
+                                  <p:childTnLst>
+                                    <p:set>
+                                      <p:cBhvr>
+                                        <p:cTn id="33" dur="1" fill="hold">
+                                          <p:stCondLst>
+                                            <p:cond delay="0"/>
+                                          </p:stCondLst>
+                                        </p:cTn>
+                                        <p:tgtEl>
+                                          <p:spTgt spid="3">
+                                            <p:txEl>
+                                              <p:pRg st="3" end="3"/>
+                                            </p:txEl>
+                                          </p:spTgt>
+                                        </p:tgtEl>
+                                        <p:attrNameLst>
+                                          <p:attrName>style.visibility</p:attrName>
+                                        </p:attrNameLst>
+                                      </p:cBhvr>
+                                      <p:to>
+                                        <p:strVal val="visible"/>
+                                      </p:to>
+                                    </p:set>
+                                    <p:anim calcmode="lin" valueType="num">
+                                      <p:cBhvr>
+                                        <p:cTn id="34" dur="500" fill="hold"/>
+                                        <p:tgtEl>
+                                          <p:spTgt spid="3">
+                                            <p:txEl>
+                                              <p:pRg st="3" end="3"/>
+                                            </p:txEl>
+                                          </p:spTgt>
+                                        </p:tgtEl>
+                                        <p:attrNameLst>
+                                          <p:attrName>ppt_x</p:attrName>
+                                        </p:attrNameLst>
+                                      </p:cBhvr>
+                                      <p:tavLst>
+                                        <p:tav tm="0">
+                                          <p:val>
+                                            <p:strVal val="#ppt_x"/>
+                                          </p:val>
+                                        </p:tav>
+                                        <p:tav tm="50000">
+                                          <p:val>
+                                            <p:strVal val="#ppt_x+.1"/>
+                                          </p:val>
+                                        </p:tav>
+                                        <p:tav tm="100000">
+                                          <p:val>
+                                            <p:strVal val="#ppt_x"/>
+                                          </p:val>
+                                        </p:tav>
+                                      </p:tavLst>
+                                    </p:anim>
+                                    <p:anim calcmode="lin" valueType="num">
+                                      <p:cBhvr>
+                                        <p:cTn id="35" dur="500" fill="hold"/>
+                                        <p:tgtEl>
+                                          <p:spTgt spid="3">
+                                            <p:txEl>
+                                              <p:pRg st="3" end="3"/>
+                                            </p:txEl>
+                                          </p:spTgt>
+                                        </p:tgtEl>
+                                        <p:attrNameLst>
+                                          <p:attrName>ppt_y</p:attrName>
+                                        </p:attrNameLst>
+                                      </p:cBhvr>
+                                      <p:tavLst>
+                                        <p:tav tm="0">
+                                          <p:val>
+                                            <p:strVal val="#ppt_y"/>
+                                          </p:val>
+                                        </p:tav>
+                                        <p:tav tm="100000">
+                                          <p:val>
+                                            <p:strVal val="#ppt_y"/>
+                                          </p:val>
+                                        </p:tav>
+                                      </p:tavLst>
+                                    </p:anim>
+                                    <p:anim calcmode="lin" valueType="num">
+                                      <p:cBhvr>
+                                        <p:cTn id="36" dur="500" fill="hold"/>
+                                        <p:tgtEl>
+                                          <p:spTgt spid="3">
+                                            <p:txEl>
+                                              <p:pRg st="3" end="3"/>
+                                            </p:txEl>
+                                          </p:spTgt>
+                                        </p:tgtEl>
+                                        <p:attrNameLst>
+                                          <p:attrName>ppt_h</p:attrName>
+                                        </p:attrNameLst>
+                                      </p:cBhvr>
+                                      <p:tavLst>
+                                        <p:tav tm="0">
+                                          <p:val>
+                                            <p:strVal val="#ppt_h/10"/>
+                                          </p:val>
+                                        </p:tav>
+                                        <p:tav tm="50000">
+                                          <p:val>
+                                            <p:strVal val="#ppt_h+.01"/>
+                                          </p:val>
+                                        </p:tav>
+                                        <p:tav tm="100000">
+                                          <p:val>
+                                            <p:strVal val="#ppt_h"/>
+                                          </p:val>
+                                        </p:tav>
+                                      </p:tavLst>
+                                    </p:anim>
+                                    <p:anim calcmode="lin" valueType="num">
+                                      <p:cBhvr>
+                                        <p:cTn id="37" dur="500" fill="hold"/>
+                                        <p:tgtEl>
+                                          <p:spTgt spid="3">
+                                            <p:txEl>
+                                              <p:pRg st="3" end="3"/>
+                                            </p:txEl>
+                                          </p:spTgt>
+                                        </p:tgtEl>
+                                        <p:attrNameLst>
+                                          <p:attrName>ppt_w</p:attrName>
+                                        </p:attrNameLst>
+                                      </p:cBhvr>
+                                      <p:tavLst>
+                                        <p:tav tm="0">
+                                          <p:val>
+                                            <p:strVal val="#ppt_w/10"/>
+                                          </p:val>
+                                        </p:tav>
+                                        <p:tav tm="50000">
+                                          <p:val>
+                                            <p:strVal val="#ppt_w+.01"/>
+                                          </p:val>
+                                        </p:tav>
+                                        <p:tav tm="100000">
+                                          <p:val>
+                                            <p:strVal val="#ppt_w"/>
+                                          </p:val>
+                                        </p:tav>
+                                      </p:tavLst>
+                                    </p:anim>
+                                    <p:animEffect transition="in" filter="fade">
+                                      <p:cBhvr>
+                                        <p:cTn id="38" dur="500" tmFilter="0,0; .5, 1; 1, 1"/>
+                                        <p:tgtEl>
+                                          <p:spTgt spid="3">
+                                            <p:txEl>
+                                              <p:pRg st="3" end="3"/>
+                                            </p:txEl>
+                                          </p:spTgt>
+                                        </p:tgtEl>
+                                      </p:cBhvr>
+                                    </p:animEffect>
+                                  </p:childTnLst>
+                                </p:cTn>
+                              </p:par>
+                              <p:par>
+                                <p:cTn id="39" presetID="41" presetClass="entr" presetSubtype="0" fill="hold" grpId="0" nodeType="withEffect">
+                                  <p:stCondLst>
+                                    <p:cond delay="0"/>
+                                  </p:stCondLst>
+                                  <p:iterate type="lt">
+                                    <p:tmPct val="10000"/>
+                                  </p:iterate>
+                                  <p:childTnLst>
+                                    <p:set>
+                                      <p:cBhvr>
+                                        <p:cTn id="40" dur="1" fill="hold">
+                                          <p:stCondLst>
+                                            <p:cond delay="0"/>
+                                          </p:stCondLst>
+                                        </p:cTn>
+                                        <p:tgtEl>
+                                          <p:spTgt spid="4">
+                                            <p:txEl>
+                                              <p:pRg st="0" end="0"/>
+                                            </p:txEl>
+                                          </p:spTgt>
+                                        </p:tgtEl>
+                                        <p:attrNameLst>
+                                          <p:attrName>style.visibility</p:attrName>
+                                        </p:attrNameLst>
+                                      </p:cBhvr>
+                                      <p:to>
+                                        <p:strVal val="visible"/>
+                                      </p:to>
+                                    </p:set>
+                                    <p:anim calcmode="lin" valueType="num">
+                                      <p:cBhvr>
+                                        <p:cTn id="41" dur="500" fill="hold"/>
+                                        <p:tgtEl>
+                                          <p:spTgt spid="4">
+                                            <p:txEl>
+                                              <p:pRg st="0" end="0"/>
+                                            </p:txEl>
+                                          </p:spTgt>
+                                        </p:tgtEl>
+                                        <p:attrNameLst>
+                                          <p:attrName>ppt_x</p:attrName>
+                                        </p:attrNameLst>
+                                      </p:cBhvr>
+                                      <p:tavLst>
+                                        <p:tav tm="0">
+                                          <p:val>
+                                            <p:strVal val="#ppt_x"/>
+                                          </p:val>
+                                        </p:tav>
+                                        <p:tav tm="50000">
+                                          <p:val>
+                                            <p:strVal val="#ppt_x+.1"/>
+                                          </p:val>
+                                        </p:tav>
+                                        <p:tav tm="100000">
+                                          <p:val>
+                                            <p:strVal val="#ppt_x"/>
+                                          </p:val>
+                                        </p:tav>
+                                      </p:tavLst>
+                                    </p:anim>
+                                    <p:anim calcmode="lin" valueType="num">
+                                      <p:cBhvr>
+                                        <p:cTn id="42" dur="500" fill="hold"/>
+                                        <p:tgtEl>
+                                          <p:spTgt spid="4">
+                                            <p:txEl>
+                                              <p:pRg st="0" end="0"/>
+                                            </p:txEl>
+                                          </p:spTgt>
+                                        </p:tgtEl>
+                                        <p:attrNameLst>
+                                          <p:attrName>ppt_y</p:attrName>
+                                        </p:attrNameLst>
+                                      </p:cBhvr>
+                                      <p:tavLst>
+                                        <p:tav tm="0">
+                                          <p:val>
+                                            <p:strVal val="#ppt_y"/>
+                                          </p:val>
+                                        </p:tav>
+                                        <p:tav tm="100000">
+                                          <p:val>
+                                            <p:strVal val="#ppt_y"/>
+                                          </p:val>
+                                        </p:tav>
+                                      </p:tavLst>
+                                    </p:anim>
+                                    <p:anim calcmode="lin" valueType="num">
+                                      <p:cBhvr>
+                                        <p:cTn id="43" dur="500" fill="hold"/>
+                                        <p:tgtEl>
+                                          <p:spTgt spid="4">
+                                            <p:txEl>
+                                              <p:pRg st="0" end="0"/>
+                                            </p:txEl>
+                                          </p:spTgt>
+                                        </p:tgtEl>
+                                        <p:attrNameLst>
+                                          <p:attrName>ppt_h</p:attrName>
+                                        </p:attrNameLst>
+                                      </p:cBhvr>
+                                      <p:tavLst>
+                                        <p:tav tm="0">
+                                          <p:val>
+                                            <p:strVal val="#ppt_h/10"/>
+                                          </p:val>
+                                        </p:tav>
+                                        <p:tav tm="50000">
+                                          <p:val>
+                                            <p:strVal val="#ppt_h+.01"/>
+                                          </p:val>
+                                        </p:tav>
+                                        <p:tav tm="100000">
+                                          <p:val>
+                                            <p:strVal val="#ppt_h"/>
+                                          </p:val>
+                                        </p:tav>
+                                      </p:tavLst>
+                                    </p:anim>
+                                    <p:anim calcmode="lin" valueType="num">
+                                      <p:cBhvr>
+                                        <p:cTn id="44" dur="500" fill="hold"/>
+                                        <p:tgtEl>
+                                          <p:spTgt spid="4">
+                                            <p:txEl>
+                                              <p:pRg st="0" end="0"/>
+                                            </p:txEl>
+                                          </p:spTgt>
+                                        </p:tgtEl>
+                                        <p:attrNameLst>
+                                          <p:attrName>ppt_w</p:attrName>
+                                        </p:attrNameLst>
+                                      </p:cBhvr>
+                                      <p:tavLst>
+                                        <p:tav tm="0">
+                                          <p:val>
+                                            <p:strVal val="#ppt_w/10"/>
+                                          </p:val>
+                                        </p:tav>
+                                        <p:tav tm="50000">
+                                          <p:val>
+                                            <p:strVal val="#ppt_w+.01"/>
+                                          </p:val>
+                                        </p:tav>
+                                        <p:tav tm="100000">
+                                          <p:val>
+                                            <p:strVal val="#ppt_w"/>
+                                          </p:val>
+                                        </p:tav>
+                                      </p:tavLst>
+                                    </p:anim>
+                                    <p:animEffect transition="in" filter="fade">
+                                      <p:cBhvr>
+                                        <p:cTn id="45" dur="500" tmFilter="0,0; .5, 1; 1, 1"/>
+                                        <p:tgtEl>
+                                          <p:spTgt spid="4">
+                                            <p:txEl>
+                                              <p:pRg st="0" end="0"/>
+                                            </p:txEl>
+                                          </p:spTgt>
+                                        </p:tgtEl>
+                                      </p:cBhvr>
+                                    </p:animEffect>
+                                  </p:childTnLst>
+                                </p:cTn>
+                              </p:par>
+                            </p:childTnLst>
+                          </p:cTn>
+                        </p:par>
+                      </p:childTnLst>
+                    </p:cTn>
+                  </p:par>
+                  <p:par>
+                    <p:cTn id="46" fill="hold">
+                      <p:stCondLst>
+                        <p:cond delay="indefinite"/>
+                      </p:stCondLst>
+                      <p:childTnLst>
+                        <p:par>
+                          <p:cTn id="47" fill="hold">
+                            <p:stCondLst>
+                              <p:cond delay="0"/>
+                            </p:stCondLst>
+                            <p:childTnLst>
+                              <p:par>
+                                <p:cTn id="48" presetID="41" presetClass="entr" presetSubtype="0" fill="hold" grpId="0" nodeType="clickEffect">
+                                  <p:stCondLst>
+                                    <p:cond delay="0"/>
+                                  </p:stCondLst>
+                                  <p:iterate type="lt">
+                                    <p:tmPct val="10000"/>
+                                  </p:iterate>
+                                  <p:childTnLst>
+                                    <p:set>
+                                      <p:cBhvr>
+                                        <p:cTn id="49" dur="1" fill="hold">
+                                          <p:stCondLst>
+                                            <p:cond delay="0"/>
+                                          </p:stCondLst>
+                                        </p:cTn>
+                                        <p:tgtEl>
+                                          <p:spTgt spid="4">
+                                            <p:txEl>
+                                              <p:pRg st="1" end="1"/>
+                                            </p:txEl>
+                                          </p:spTgt>
+                                        </p:tgtEl>
+                                        <p:attrNameLst>
+                                          <p:attrName>style.visibility</p:attrName>
+                                        </p:attrNameLst>
+                                      </p:cBhvr>
+                                      <p:to>
+                                        <p:strVal val="visible"/>
+                                      </p:to>
+                                    </p:set>
+                                    <p:anim calcmode="lin" valueType="num">
+                                      <p:cBhvr>
+                                        <p:cTn id="50" dur="500" fill="hold"/>
+                                        <p:tgtEl>
+                                          <p:spTgt spid="4">
+                                            <p:txEl>
+                                              <p:pRg st="1" end="1"/>
+                                            </p:txEl>
+                                          </p:spTgt>
+                                        </p:tgtEl>
+                                        <p:attrNameLst>
+                                          <p:attrName>ppt_x</p:attrName>
+                                        </p:attrNameLst>
+                                      </p:cBhvr>
+                                      <p:tavLst>
+                                        <p:tav tm="0">
+                                          <p:val>
+                                            <p:strVal val="#ppt_x"/>
+                                          </p:val>
+                                        </p:tav>
+                                        <p:tav tm="50000">
+                                          <p:val>
+                                            <p:strVal val="#ppt_x+.1"/>
+                                          </p:val>
+                                        </p:tav>
+                                        <p:tav tm="100000">
+                                          <p:val>
+                                            <p:strVal val="#ppt_x"/>
+                                          </p:val>
+                                        </p:tav>
+                                      </p:tavLst>
+                                    </p:anim>
+                                    <p:anim calcmode="lin" valueType="num">
+                                      <p:cBhvr>
+                                        <p:cTn id="51" dur="500" fill="hold"/>
+                                        <p:tgtEl>
+                                          <p:spTgt spid="4">
+                                            <p:txEl>
+                                              <p:pRg st="1" end="1"/>
+                                            </p:txEl>
+                                          </p:spTgt>
+                                        </p:tgtEl>
+                                        <p:attrNameLst>
+                                          <p:attrName>ppt_y</p:attrName>
+                                        </p:attrNameLst>
+                                      </p:cBhvr>
+                                      <p:tavLst>
+                                        <p:tav tm="0">
+                                          <p:val>
+                                            <p:strVal val="#ppt_y"/>
+                                          </p:val>
+                                        </p:tav>
+                                        <p:tav tm="100000">
+                                          <p:val>
+                                            <p:strVal val="#ppt_y"/>
+                                          </p:val>
+                                        </p:tav>
+                                      </p:tavLst>
+                                    </p:anim>
+                                    <p:anim calcmode="lin" valueType="num">
+                                      <p:cBhvr>
+                                        <p:cTn id="52" dur="500" fill="hold"/>
+                                        <p:tgtEl>
+                                          <p:spTgt spid="4">
+                                            <p:txEl>
+                                              <p:pRg st="1" end="1"/>
+                                            </p:txEl>
+                                          </p:spTgt>
+                                        </p:tgtEl>
+                                        <p:attrNameLst>
+                                          <p:attrName>ppt_h</p:attrName>
+                                        </p:attrNameLst>
+                                      </p:cBhvr>
+                                      <p:tavLst>
+                                        <p:tav tm="0">
+                                          <p:val>
+                                            <p:strVal val="#ppt_h/10"/>
+                                          </p:val>
+                                        </p:tav>
+                                        <p:tav tm="50000">
+                                          <p:val>
+                                            <p:strVal val="#ppt_h+.01"/>
+                                          </p:val>
+                                        </p:tav>
+                                        <p:tav tm="100000">
+                                          <p:val>
+                                            <p:strVal val="#ppt_h"/>
+                                          </p:val>
+                                        </p:tav>
+                                      </p:tavLst>
+                                    </p:anim>
+                                    <p:anim calcmode="lin" valueType="num">
+                                      <p:cBhvr>
+                                        <p:cTn id="53" dur="500" fill="hold"/>
+                                        <p:tgtEl>
+                                          <p:spTgt spid="4">
+                                            <p:txEl>
+                                              <p:pRg st="1" end="1"/>
+                                            </p:txEl>
+                                          </p:spTgt>
+                                        </p:tgtEl>
+                                        <p:attrNameLst>
+                                          <p:attrName>ppt_w</p:attrName>
+                                        </p:attrNameLst>
+                                      </p:cBhvr>
+                                      <p:tavLst>
+                                        <p:tav tm="0">
+                                          <p:val>
+                                            <p:strVal val="#ppt_w/10"/>
+                                          </p:val>
+                                        </p:tav>
+                                        <p:tav tm="50000">
+                                          <p:val>
+                                            <p:strVal val="#ppt_w+.01"/>
+                                          </p:val>
+                                        </p:tav>
+                                        <p:tav tm="100000">
+                                          <p:val>
+                                            <p:strVal val="#ppt_w"/>
+                                          </p:val>
+                                        </p:tav>
+                                      </p:tavLst>
+                                    </p:anim>
+                                    <p:animEffect transition="in" filter="fade">
+                                      <p:cBhvr>
+                                        <p:cTn id="54" dur="500" tmFilter="0,0; .5, 1; 1, 1"/>
+                                        <p:tgtEl>
+                                          <p:spTgt spid="4">
+                                            <p:txEl>
+                                              <p:pRg st="1" end="1"/>
+                                            </p:txEl>
+                                          </p:spTgt>
+                                        </p:tgtEl>
+                                      </p:cBhvr>
+                                    </p:animEffect>
+                                  </p:childTnLst>
+                                </p:cTn>
+                              </p:par>
+                            </p:childTnLst>
+                          </p:cTn>
+                        </p:par>
+                      </p:childTnLst>
+                    </p:cTn>
+                  </p:par>
+                  <p:par>
+                    <p:cTn id="55" fill="hold">
+                      <p:stCondLst>
+                        <p:cond delay="indefinite"/>
+                      </p:stCondLst>
+                      <p:childTnLst>
+                        <p:par>
+                          <p:cTn id="56" fill="hold">
+                            <p:stCondLst>
+                              <p:cond delay="0"/>
+                            </p:stCondLst>
+                            <p:childTnLst>
+                              <p:par>
+                                <p:cTn id="57" presetID="41" presetClass="entr" presetSubtype="0" fill="hold" grpId="0" nodeType="clickEffect">
+                                  <p:stCondLst>
+                                    <p:cond delay="0"/>
+                                  </p:stCondLst>
+                                  <p:iterate type="lt">
+                                    <p:tmPct val="10000"/>
+                                  </p:iterate>
+                                  <p:childTnLst>
+                                    <p:set>
+                                      <p:cBhvr>
+                                        <p:cTn id="58" dur="1" fill="hold">
+                                          <p:stCondLst>
+                                            <p:cond delay="0"/>
+                                          </p:stCondLst>
+                                        </p:cTn>
+                                        <p:tgtEl>
+                                          <p:spTgt spid="4">
+                                            <p:txEl>
+                                              <p:pRg st="2" end="2"/>
+                                            </p:txEl>
+                                          </p:spTgt>
+                                        </p:tgtEl>
+                                        <p:attrNameLst>
+                                          <p:attrName>style.visibility</p:attrName>
+                                        </p:attrNameLst>
+                                      </p:cBhvr>
+                                      <p:to>
+                                        <p:strVal val="visible"/>
+                                      </p:to>
+                                    </p:set>
+                                    <p:anim calcmode="lin" valueType="num">
+                                      <p:cBhvr>
+                                        <p:cTn id="59" dur="500" fill="hold"/>
+                                        <p:tgtEl>
+                                          <p:spTgt spid="4">
+                                            <p:txEl>
+                                              <p:pRg st="2" end="2"/>
+                                            </p:txEl>
+                                          </p:spTgt>
+                                        </p:tgtEl>
+                                        <p:attrNameLst>
+                                          <p:attrName>ppt_x</p:attrName>
+                                        </p:attrNameLst>
+                                      </p:cBhvr>
+                                      <p:tavLst>
+                                        <p:tav tm="0">
+                                          <p:val>
+                                            <p:strVal val="#ppt_x"/>
+                                          </p:val>
+                                        </p:tav>
+                                        <p:tav tm="50000">
+                                          <p:val>
+                                            <p:strVal val="#ppt_x+.1"/>
+                                          </p:val>
+                                        </p:tav>
+                                        <p:tav tm="100000">
+                                          <p:val>
+                                            <p:strVal val="#ppt_x"/>
+                                          </p:val>
+                                        </p:tav>
+                                      </p:tavLst>
+                                    </p:anim>
+                                    <p:anim calcmode="lin" valueType="num">
+                                      <p:cBhvr>
+                                        <p:cTn id="60" dur="500" fill="hold"/>
+                                        <p:tgtEl>
+                                          <p:spTgt spid="4">
+                                            <p:txEl>
+                                              <p:pRg st="2" end="2"/>
+                                            </p:txEl>
+                                          </p:spTgt>
+                                        </p:tgtEl>
+                                        <p:attrNameLst>
+                                          <p:attrName>ppt_y</p:attrName>
+                                        </p:attrNameLst>
+                                      </p:cBhvr>
+                                      <p:tavLst>
+                                        <p:tav tm="0">
+                                          <p:val>
+                                            <p:strVal val="#ppt_y"/>
+                                          </p:val>
+                                        </p:tav>
+                                        <p:tav tm="100000">
+                                          <p:val>
+                                            <p:strVal val="#ppt_y"/>
+                                          </p:val>
+                                        </p:tav>
+                                      </p:tavLst>
+                                    </p:anim>
+                                    <p:anim calcmode="lin" valueType="num">
+                                      <p:cBhvr>
+                                        <p:cTn id="61" dur="500" fill="hold"/>
+                                        <p:tgtEl>
+                                          <p:spTgt spid="4">
+                                            <p:txEl>
+                                              <p:pRg st="2" end="2"/>
+                                            </p:txEl>
+                                          </p:spTgt>
+                                        </p:tgtEl>
+                                        <p:attrNameLst>
+                                          <p:attrName>ppt_h</p:attrName>
+                                        </p:attrNameLst>
+                                      </p:cBhvr>
+                                      <p:tavLst>
+                                        <p:tav tm="0">
+                                          <p:val>
+                                            <p:strVal val="#ppt_h/10"/>
+                                          </p:val>
+                                        </p:tav>
+                                        <p:tav tm="50000">
+                                          <p:val>
+                                            <p:strVal val="#ppt_h+.01"/>
+                                          </p:val>
+                                        </p:tav>
+                                        <p:tav tm="100000">
+                                          <p:val>
+                                            <p:strVal val="#ppt_h"/>
+                                          </p:val>
+                                        </p:tav>
+                                      </p:tavLst>
+                                    </p:anim>
+                                    <p:anim calcmode="lin" valueType="num">
+                                      <p:cBhvr>
+                                        <p:cTn id="62" dur="500" fill="hold"/>
+                                        <p:tgtEl>
+                                          <p:spTgt spid="4">
+                                            <p:txEl>
+                                              <p:pRg st="2" end="2"/>
+                                            </p:txEl>
+                                          </p:spTgt>
+                                        </p:tgtEl>
+                                        <p:attrNameLst>
+                                          <p:attrName>ppt_w</p:attrName>
+                                        </p:attrNameLst>
+                                      </p:cBhvr>
+                                      <p:tavLst>
+                                        <p:tav tm="0">
+                                          <p:val>
+                                            <p:strVal val="#ppt_w/10"/>
+                                          </p:val>
+                                        </p:tav>
+                                        <p:tav tm="50000">
+                                          <p:val>
+                                            <p:strVal val="#ppt_w+.01"/>
+                                          </p:val>
+                                        </p:tav>
+                                        <p:tav tm="100000">
+                                          <p:val>
+                                            <p:strVal val="#ppt_w"/>
+                                          </p:val>
+                                        </p:tav>
+                                      </p:tavLst>
+                                    </p:anim>
+                                    <p:animEffect transition="in" filter="fade">
+                                      <p:cBhvr>
+                                        <p:cTn id="63" dur="500" tmFilter="0,0; .5, 1; 1, 1"/>
+                                        <p:tgtEl>
+                                          <p:spTgt spid="4">
+                                            <p:txEl>
+                                              <p:pRg st="2" end="2"/>
+                                            </p:txEl>
+                                          </p:spTgt>
+                                        </p:tgtEl>
+                                      </p:cBhvr>
+                                    </p:animEffect>
+                                  </p:childTnLst>
+                                </p:cTn>
+                              </p:par>
+                            </p:childTnLst>
+                          </p:cTn>
+                        </p:par>
+                      </p:childTnLst>
+                    </p:cTn>
+                  </p:par>
+                  <p:par>
+                    <p:cTn id="64" fill="hold">
+                      <p:stCondLst>
+                        <p:cond delay="indefinite"/>
+                      </p:stCondLst>
+                      <p:childTnLst>
+                        <p:par>
+                          <p:cTn id="65" fill="hold">
+                            <p:stCondLst>
+                              <p:cond delay="0"/>
+                            </p:stCondLst>
+                            <p:childTnLst>
+                              <p:par>
+                                <p:cTn id="66" presetID="41" presetClass="entr" presetSubtype="0" fill="hold" grpId="0" nodeType="clickEffect">
+                                  <p:stCondLst>
+                                    <p:cond delay="0"/>
+                                  </p:stCondLst>
+                                  <p:iterate type="lt">
+                                    <p:tmPct val="10000"/>
+                                  </p:iterate>
+                                  <p:childTnLst>
+                                    <p:set>
+                                      <p:cBhvr>
+                                        <p:cTn id="67" dur="1" fill="hold">
+                                          <p:stCondLst>
+                                            <p:cond delay="0"/>
+                                          </p:stCondLst>
+                                        </p:cTn>
+                                        <p:tgtEl>
+                                          <p:spTgt spid="4">
+                                            <p:txEl>
+                                              <p:pRg st="3" end="3"/>
+                                            </p:txEl>
+                                          </p:spTgt>
+                                        </p:tgtEl>
+                                        <p:attrNameLst>
+                                          <p:attrName>style.visibility</p:attrName>
+                                        </p:attrNameLst>
+                                      </p:cBhvr>
+                                      <p:to>
+                                        <p:strVal val="visible"/>
+                                      </p:to>
+                                    </p:set>
+                                    <p:anim calcmode="lin" valueType="num">
+                                      <p:cBhvr>
+                                        <p:cTn id="68" dur="500" fill="hold"/>
+                                        <p:tgtEl>
+                                          <p:spTgt spid="4">
+                                            <p:txEl>
+                                              <p:pRg st="3" end="3"/>
+                                            </p:txEl>
+                                          </p:spTgt>
+                                        </p:tgtEl>
+                                        <p:attrNameLst>
+                                          <p:attrName>ppt_x</p:attrName>
+                                        </p:attrNameLst>
+                                      </p:cBhvr>
+                                      <p:tavLst>
+                                        <p:tav tm="0">
+                                          <p:val>
+                                            <p:strVal val="#ppt_x"/>
+                                          </p:val>
+                                        </p:tav>
+                                        <p:tav tm="50000">
+                                          <p:val>
+                                            <p:strVal val="#ppt_x+.1"/>
+                                          </p:val>
+                                        </p:tav>
+                                        <p:tav tm="100000">
+                                          <p:val>
+                                            <p:strVal val="#ppt_x"/>
+                                          </p:val>
+                                        </p:tav>
+                                      </p:tavLst>
+                                    </p:anim>
+                                    <p:anim calcmode="lin" valueType="num">
+                                      <p:cBhvr>
+                                        <p:cTn id="69" dur="500" fill="hold"/>
+                                        <p:tgtEl>
+                                          <p:spTgt spid="4">
+                                            <p:txEl>
+                                              <p:pRg st="3" end="3"/>
+                                            </p:txEl>
+                                          </p:spTgt>
+                                        </p:tgtEl>
+                                        <p:attrNameLst>
+                                          <p:attrName>ppt_y</p:attrName>
+                                        </p:attrNameLst>
+                                      </p:cBhvr>
+                                      <p:tavLst>
+                                        <p:tav tm="0">
+                                          <p:val>
+                                            <p:strVal val="#ppt_y"/>
+                                          </p:val>
+                                        </p:tav>
+                                        <p:tav tm="100000">
+                                          <p:val>
+                                            <p:strVal val="#ppt_y"/>
+                                          </p:val>
+                                        </p:tav>
+                                      </p:tavLst>
+                                    </p:anim>
+                                    <p:anim calcmode="lin" valueType="num">
+                                      <p:cBhvr>
+                                        <p:cTn id="70" dur="500" fill="hold"/>
+                                        <p:tgtEl>
+                                          <p:spTgt spid="4">
+                                            <p:txEl>
+                                              <p:pRg st="3" end="3"/>
+                                            </p:txEl>
+                                          </p:spTgt>
+                                        </p:tgtEl>
+                                        <p:attrNameLst>
+                                          <p:attrName>ppt_h</p:attrName>
+                                        </p:attrNameLst>
+                                      </p:cBhvr>
+                                      <p:tavLst>
+                                        <p:tav tm="0">
+                                          <p:val>
+                                            <p:strVal val="#ppt_h/10"/>
+                                          </p:val>
+                                        </p:tav>
+                                        <p:tav tm="50000">
+                                          <p:val>
+                                            <p:strVal val="#ppt_h+.01"/>
+                                          </p:val>
+                                        </p:tav>
+                                        <p:tav tm="100000">
+                                          <p:val>
+                                            <p:strVal val="#ppt_h"/>
+                                          </p:val>
+                                        </p:tav>
+                                      </p:tavLst>
+                                    </p:anim>
+                                    <p:anim calcmode="lin" valueType="num">
+                                      <p:cBhvr>
+                                        <p:cTn id="71" dur="500" fill="hold"/>
+                                        <p:tgtEl>
+                                          <p:spTgt spid="4">
+                                            <p:txEl>
+                                              <p:pRg st="3" end="3"/>
+                                            </p:txEl>
+                                          </p:spTgt>
+                                        </p:tgtEl>
+                                        <p:attrNameLst>
+                                          <p:attrName>ppt_w</p:attrName>
+                                        </p:attrNameLst>
+                                      </p:cBhvr>
+                                      <p:tavLst>
+                                        <p:tav tm="0">
+                                          <p:val>
+                                            <p:strVal val="#ppt_w/10"/>
+                                          </p:val>
+                                        </p:tav>
+                                        <p:tav tm="50000">
+                                          <p:val>
+                                            <p:strVal val="#ppt_w+.01"/>
+                                          </p:val>
+                                        </p:tav>
+                                        <p:tav tm="100000">
+                                          <p:val>
+                                            <p:strVal val="#ppt_w"/>
+                                          </p:val>
+                                        </p:tav>
+                                      </p:tavLst>
+                                    </p:anim>
+                                    <p:animEffect transition="in" filter="fade">
+                                      <p:cBhvr>
+                                        <p:cTn id="72" dur="500" tmFilter="0,0; .5, 1; 1, 1"/>
+                                        <p:tgtEl>
+                                          <p:spTgt spid="4">
+                                            <p:txEl>
+                                              <p:pRg st="3" end="3"/>
+                                            </p:txEl>
+                                          </p:spTgt>
+                                        </p:tgtEl>
+                                      </p:cBhvr>
+                                    </p:animEffect>
+                                  </p:childTnLst>
+                                </p:cTn>
+                              </p:par>
+                            </p:childTnLst>
+                          </p:cTn>
+                        </p:par>
+                      </p:childTnLst>
+                    </p:cTn>
+                  </p:par>
+                  <p:par>
+                    <p:cTn id="73" fill="hold">
+                      <p:stCondLst>
+                        <p:cond delay="indefinite"/>
+                      </p:stCondLst>
+                      <p:childTnLst>
+                        <p:par>
+                          <p:cTn id="74" fill="hold">
+                            <p:stCondLst>
+                              <p:cond delay="0"/>
+                            </p:stCondLst>
+                            <p:childTnLst>
+                              <p:par>
+                                <p:cTn id="75" presetID="41" presetClass="entr" presetSubtype="0" fill="hold" grpId="0" nodeType="clickEffect">
+                                  <p:stCondLst>
+                                    <p:cond delay="0"/>
+                                  </p:stCondLst>
+                                  <p:iterate type="lt">
+                                    <p:tmPct val="10000"/>
+                                  </p:iterate>
+                                  <p:childTnLst>
+                                    <p:set>
+                                      <p:cBhvr>
+                                        <p:cTn id="76" dur="1" fill="hold">
+                                          <p:stCondLst>
+                                            <p:cond delay="0"/>
+                                          </p:stCondLst>
+                                        </p:cTn>
+                                        <p:tgtEl>
+                                          <p:spTgt spid="4">
+                                            <p:txEl>
+                                              <p:pRg st="4" end="4"/>
+                                            </p:txEl>
+                                          </p:spTgt>
+                                        </p:tgtEl>
+                                        <p:attrNameLst>
+                                          <p:attrName>style.visibility</p:attrName>
+                                        </p:attrNameLst>
+                                      </p:cBhvr>
+                                      <p:to>
+                                        <p:strVal val="visible"/>
+                                      </p:to>
+                                    </p:set>
+                                    <p:anim calcmode="lin" valueType="num">
+                                      <p:cBhvr>
+                                        <p:cTn id="77" dur="500" fill="hold"/>
+                                        <p:tgtEl>
+                                          <p:spTgt spid="4">
+                                            <p:txEl>
+                                              <p:pRg st="4" end="4"/>
+                                            </p:txEl>
+                                          </p:spTgt>
+                                        </p:tgtEl>
+                                        <p:attrNameLst>
+                                          <p:attrName>ppt_x</p:attrName>
+                                        </p:attrNameLst>
+                                      </p:cBhvr>
+                                      <p:tavLst>
+                                        <p:tav tm="0">
+                                          <p:val>
+                                            <p:strVal val="#ppt_x"/>
+                                          </p:val>
+                                        </p:tav>
+                                        <p:tav tm="50000">
+                                          <p:val>
+                                            <p:strVal val="#ppt_x+.1"/>
+                                          </p:val>
+                                        </p:tav>
+                                        <p:tav tm="100000">
+                                          <p:val>
+                                            <p:strVal val="#ppt_x"/>
+                                          </p:val>
+                                        </p:tav>
+                                      </p:tavLst>
+                                    </p:anim>
+                                    <p:anim calcmode="lin" valueType="num">
+                                      <p:cBhvr>
+                                        <p:cTn id="78" dur="500" fill="hold"/>
+                                        <p:tgtEl>
+                                          <p:spTgt spid="4">
+                                            <p:txEl>
+                                              <p:pRg st="4" end="4"/>
+                                            </p:txEl>
+                                          </p:spTgt>
+                                        </p:tgtEl>
+                                        <p:attrNameLst>
+                                          <p:attrName>ppt_y</p:attrName>
+                                        </p:attrNameLst>
+                                      </p:cBhvr>
+                                      <p:tavLst>
+                                        <p:tav tm="0">
+                                          <p:val>
+                                            <p:strVal val="#ppt_y"/>
+                                          </p:val>
+                                        </p:tav>
+                                        <p:tav tm="100000">
+                                          <p:val>
+                                            <p:strVal val="#ppt_y"/>
+                                          </p:val>
+                                        </p:tav>
+                                      </p:tavLst>
+                                    </p:anim>
+                                    <p:anim calcmode="lin" valueType="num">
+                                      <p:cBhvr>
+                                        <p:cTn id="79" dur="500" fill="hold"/>
+                                        <p:tgtEl>
+                                          <p:spTgt spid="4">
+                                            <p:txEl>
+                                              <p:pRg st="4" end="4"/>
+                                            </p:txEl>
+                                          </p:spTgt>
+                                        </p:tgtEl>
+                                        <p:attrNameLst>
+                                          <p:attrName>ppt_h</p:attrName>
+                                        </p:attrNameLst>
+                                      </p:cBhvr>
+                                      <p:tavLst>
+                                        <p:tav tm="0">
+                                          <p:val>
+                                            <p:strVal val="#ppt_h/10"/>
+                                          </p:val>
+                                        </p:tav>
+                                        <p:tav tm="50000">
+                                          <p:val>
+                                            <p:strVal val="#ppt_h+.01"/>
+                                          </p:val>
+                                        </p:tav>
+                                        <p:tav tm="100000">
+                                          <p:val>
+                                            <p:strVal val="#ppt_h"/>
+                                          </p:val>
+                                        </p:tav>
+                                      </p:tavLst>
+                                    </p:anim>
+                                    <p:anim calcmode="lin" valueType="num">
+                                      <p:cBhvr>
+                                        <p:cTn id="80" dur="500" fill="hold"/>
+                                        <p:tgtEl>
+                                          <p:spTgt spid="4">
+                                            <p:txEl>
+                                              <p:pRg st="4" end="4"/>
+                                            </p:txEl>
+                                          </p:spTgt>
+                                        </p:tgtEl>
+                                        <p:attrNameLst>
+                                          <p:attrName>ppt_w</p:attrName>
+                                        </p:attrNameLst>
+                                      </p:cBhvr>
+                                      <p:tavLst>
+                                        <p:tav tm="0">
+                                          <p:val>
+                                            <p:strVal val="#ppt_w/10"/>
+                                          </p:val>
+                                        </p:tav>
+                                        <p:tav tm="50000">
+                                          <p:val>
+                                            <p:strVal val="#ppt_w+.01"/>
+                                          </p:val>
+                                        </p:tav>
+                                        <p:tav tm="100000">
+                                          <p:val>
+                                            <p:strVal val="#ppt_w"/>
+                                          </p:val>
+                                        </p:tav>
+                                      </p:tavLst>
+                                    </p:anim>
+                                    <p:animEffect transition="in" filter="fade">
+                                      <p:cBhvr>
+                                        <p:cTn id="81" dur="500" tmFilter="0,0; .5, 1; 1, 1"/>
+                                        <p:tgtEl>
+                                          <p:spTgt spid="4">
+                                            <p:txEl>
+                                              <p:pRg st="4" end="4"/>
+                                            </p:txEl>
+                                          </p:spTgt>
+                                        </p:tgtEl>
+                                      </p:cBhvr>
+                                    </p:animEffect>
+                                  </p:childTnLst>
+                                </p:cTn>
+                              </p:par>
+                            </p:childTnLst>
+                          </p:cTn>
+                        </p:par>
+                      </p:childTnLst>
+                    </p:cTn>
+                  </p:par>
+                </p:childTnLst>
+              </p:cTn>
+              <p:prevCondLst>
+                <p:cond evt="onPrev" delay="0">
+                  <p:tgtEl>
+                    <p:sldTgt/>
+                  </p:tgtEl>
+                </p:cond>
+              </p:prevCondLst>
+              <p:nextCondLst>
+                <p:cond evt="onNext" delay="0">
+                  <p:tgtEl>
+                    <p:sldTgt/>
+                  </p:tgtEl>
+                </p:cond>
+              </p:nextCondLst>
+            </p:seq>
+          </p:childTnLst>
+        </p:cTn>
+      </p:par>
+    </p:tnLst>
+    <p:bldLst>
+      <p:bldP spid="3" grpId="0" uiExpand="1" build="p"/>
+      <p:bldP spid="4" grpId="0" uiExpand="1" build="p"/>
+    </p:bldLst>
+  </p:timing>
 </p:sld>
 </file>
 

--- a/Presentation/SC_Birb_Presentation.pptx
+++ b/Presentation/SC_Birb_Presentation.pptx
@@ -118,6 +118,11 @@
       </a:defRPr>
     </a:lvl9pPr>
   </p:defaultTextStyle>
+  <p:extLst>
+    <p:ext uri="{EFAFB233-063F-42B5-8137-9DF3F51BA10A}">
+      <p15:sldGuideLst xmlns:p15="http://schemas.microsoft.com/office/powerpoint/2012/main"/>
+    </p:ext>
+  </p:extLst>
 </p:presentation>
 </file>
 
@@ -2754,7 +2759,7 @@
           <a:p>
             <a:fld id="{1530D8A3-C079-9842-A0E2-9EE788FD1D87}" type="datetimeFigureOut">
               <a:rPr lang="en-US" smtClean="0"/>
-              <a:t>3/11/26</a:t>
+              <a:t>3/12/26</a:t>
             </a:fld>
             <a:endParaRPr lang="en-US"/>
           </a:p>
@@ -4357,7 +4362,7 @@
           <a:p>
             <a:fld id="{436AD716-3EED-A945-A6E4-ADEDF63809AF}" type="datetimeFigureOut">
               <a:rPr lang="en-US" smtClean="0"/>
-              <a:t>3/11/26</a:t>
+              <a:t>3/12/26</a:t>
             </a:fld>
             <a:endParaRPr lang="en-US"/>
           </a:p>
@@ -4527,7 +4532,7 @@
           <a:p>
             <a:fld id="{436AD716-3EED-A945-A6E4-ADEDF63809AF}" type="datetimeFigureOut">
               <a:rPr lang="en-US" smtClean="0"/>
-              <a:t>3/11/26</a:t>
+              <a:t>3/12/26</a:t>
             </a:fld>
             <a:endParaRPr lang="en-US"/>
           </a:p>
@@ -4707,7 +4712,7 @@
           <a:p>
             <a:fld id="{436AD716-3EED-A945-A6E4-ADEDF63809AF}" type="datetimeFigureOut">
               <a:rPr lang="en-US" smtClean="0"/>
-              <a:t>3/11/26</a:t>
+              <a:t>3/12/26</a:t>
             </a:fld>
             <a:endParaRPr lang="en-US"/>
           </a:p>
@@ -4877,7 +4882,7 @@
           <a:p>
             <a:fld id="{436AD716-3EED-A945-A6E4-ADEDF63809AF}" type="datetimeFigureOut">
               <a:rPr lang="en-US" smtClean="0"/>
-              <a:t>3/11/26</a:t>
+              <a:t>3/12/26</a:t>
             </a:fld>
             <a:endParaRPr lang="en-US"/>
           </a:p>
@@ -5145,7 +5150,7 @@
           <a:p>
             <a:fld id="{436AD716-3EED-A945-A6E4-ADEDF63809AF}" type="datetimeFigureOut">
               <a:rPr lang="en-US" smtClean="0"/>
-              <a:t>3/11/26</a:t>
+              <a:t>3/12/26</a:t>
             </a:fld>
             <a:endParaRPr lang="en-US"/>
           </a:p>
@@ -5377,7 +5382,7 @@
           <a:p>
             <a:fld id="{436AD716-3EED-A945-A6E4-ADEDF63809AF}" type="datetimeFigureOut">
               <a:rPr lang="en-US" smtClean="0"/>
-              <a:t>3/11/26</a:t>
+              <a:t>3/12/26</a:t>
             </a:fld>
             <a:endParaRPr lang="en-US"/>
           </a:p>
@@ -5736,7 +5741,7 @@
           <a:p>
             <a:fld id="{436AD716-3EED-A945-A6E4-ADEDF63809AF}" type="datetimeFigureOut">
               <a:rPr lang="en-US" smtClean="0"/>
-              <a:t>3/11/26</a:t>
+              <a:t>3/12/26</a:t>
             </a:fld>
             <a:endParaRPr lang="en-US"/>
           </a:p>
@@ -5877,7 +5882,7 @@
           <a:p>
             <a:fld id="{436AD716-3EED-A945-A6E4-ADEDF63809AF}" type="datetimeFigureOut">
               <a:rPr lang="en-US" smtClean="0"/>
-              <a:t>3/11/26</a:t>
+              <a:t>3/12/26</a:t>
             </a:fld>
             <a:endParaRPr lang="en-US"/>
           </a:p>
@@ -5972,7 +5977,7 @@
           <a:p>
             <a:fld id="{436AD716-3EED-A945-A6E4-ADEDF63809AF}" type="datetimeFigureOut">
               <a:rPr lang="en-US" smtClean="0"/>
-              <a:t>3/11/26</a:t>
+              <a:t>3/12/26</a:t>
             </a:fld>
             <a:endParaRPr lang="en-US"/>
           </a:p>
@@ -6329,7 +6334,7 @@
           <a:p>
             <a:fld id="{436AD716-3EED-A945-A6E4-ADEDF63809AF}" type="datetimeFigureOut">
               <a:rPr lang="en-US" smtClean="0"/>
-              <a:t>3/11/26</a:t>
+              <a:t>3/12/26</a:t>
             </a:fld>
             <a:endParaRPr lang="en-US"/>
           </a:p>
@@ -6686,7 +6691,7 @@
           <a:p>
             <a:fld id="{436AD716-3EED-A945-A6E4-ADEDF63809AF}" type="datetimeFigureOut">
               <a:rPr lang="en-US" smtClean="0"/>
-              <a:t>3/11/26</a:t>
+              <a:t>3/12/26</a:t>
             </a:fld>
             <a:endParaRPr lang="en-US"/>
           </a:p>
@@ -6928,7 +6933,7 @@
           <a:p>
             <a:fld id="{436AD716-3EED-A945-A6E4-ADEDF63809AF}" type="datetimeFigureOut">
               <a:rPr lang="en-US" smtClean="0"/>
-              <a:t>3/11/26</a:t>
+              <a:t>3/12/26</a:t>
             </a:fld>
             <a:endParaRPr lang="en-US"/>
           </a:p>
@@ -7934,6 +7939,38 @@
           </a:p>
         </p:txBody>
       </p:sp>
+      <p:sp>
+        <p:nvSpPr>
+          <p:cNvPr id="3" name="TextBox 2">
+            <a:extLst>
+              <a:ext uri="{FF2B5EF4-FFF2-40B4-BE49-F238E27FC236}">
+                <a16:creationId xmlns:a16="http://schemas.microsoft.com/office/drawing/2014/main" id="{BAC07DD1-DCFE-4281-2392-B1D0D1EEC89D}"/>
+              </a:ext>
+            </a:extLst>
+          </p:cNvPr>
+          <p:cNvSpPr txBox="1"/>
+          <p:nvPr/>
+        </p:nvSpPr>
+        <p:spPr>
+          <a:xfrm>
+            <a:off x="-445770" y="3063240"/>
+            <a:ext cx="184731" cy="369332"/>
+          </a:xfrm>
+          <a:prstGeom prst="rect">
+            <a:avLst/>
+          </a:prstGeom>
+          <a:noFill/>
+        </p:spPr>
+        <p:txBody>
+          <a:bodyPr wrap="none" rtlCol="0">
+            <a:spAutoFit/>
+          </a:bodyPr>
+          <a:lstStyle/>
+          <a:p>
+            <a:endParaRPr lang="en-US" dirty="0"/>
+          </a:p>
+        </p:txBody>
+      </p:sp>
     </p:spTree>
     <p:extLst>
       <p:ext uri="{BB962C8B-B14F-4D97-AF65-F5344CB8AC3E}">
@@ -8018,6 +8055,18 @@
               <a:t>PROS:</a:t>
             </a:r>
           </a:p>
+          <a:p>
+            <a:r>
+              <a:rPr lang="en-US" dirty="0"/>
+              <a:t>UI intuitive</a:t>
+            </a:r>
+          </a:p>
+          <a:p>
+            <a:r>
+              <a:rPr lang="en-US" dirty="0"/>
+              <a:t>Sounds cool</a:t>
+            </a:r>
+          </a:p>
         </p:txBody>
       </p:sp>
       <p:sp>
@@ -8045,6 +8094,27 @@
               <a:rPr lang="en-US" dirty="0"/>
               <a:t>CONS:</a:t>
             </a:r>
+          </a:p>
+          <a:p>
+            <a:r>
+              <a:rPr lang="en-US" dirty="0"/>
+              <a:t>Implementation sucked</a:t>
+            </a:r>
+          </a:p>
+          <a:p>
+            <a:r>
+              <a:rPr lang="en-US" dirty="0"/>
+              <a:t>Not interactive enough</a:t>
+            </a:r>
+          </a:p>
+          <a:p>
+            <a:r>
+              <a:rPr lang="en-US" dirty="0"/>
+              <a:t>Could use more parameters</a:t>
+            </a:r>
+          </a:p>
+          <a:p>
+            <a:endParaRPr lang="en-US" dirty="0"/>
           </a:p>
         </p:txBody>
       </p:sp>
